--- a/projetIntegrateur/modele_DESS_projet.pptx
+++ b/projetIntegrateur/modele_DESS_projet.pptx
@@ -6,6 +6,7 @@
   </p:sldMasterIdLst>
   <p:sldIdLst>
     <p:sldId id="256" r:id="rId2"/>
+    <p:sldId id="257" r:id="rId3"/>
   </p:sldIdLst>
   <p:sldSz cx="12192000" cy="6858000"/>
   <p:notesSz cx="6858000" cy="9144000"/>
@@ -104,6 +105,11 @@
       </a:defRPr>
     </a:lvl9pPr>
   </p:defaultTextStyle>
+  <p:extLst>
+    <p:ext uri="{EFAFB233-063F-42B5-8137-9DF3F51BA10A}">
+      <p15:sldGuideLst xmlns:p15="http://schemas.microsoft.com/office/powerpoint/2012/main"/>
+    </p:ext>
+  </p:extLst>
 </p:presentation>
 </file>
 
@@ -256,7 +262,7 @@
           <a:p>
             <a:fld id="{38416E33-4BF1-4672-BB4C-21DB2CE80CBA}" type="datetimeFigureOut">
               <a:rPr lang="en-CA" smtClean="0"/>
-              <a:t>2026-02-04</a:t>
+              <a:t>2026-03-13</a:t>
             </a:fld>
             <a:endParaRPr lang="en-CA"/>
           </a:p>
@@ -456,7 +462,7 @@
           <a:p>
             <a:fld id="{38416E33-4BF1-4672-BB4C-21DB2CE80CBA}" type="datetimeFigureOut">
               <a:rPr lang="en-CA" smtClean="0"/>
-              <a:t>2026-02-04</a:t>
+              <a:t>2026-03-13</a:t>
             </a:fld>
             <a:endParaRPr lang="en-CA"/>
           </a:p>
@@ -666,7 +672,7 @@
           <a:p>
             <a:fld id="{38416E33-4BF1-4672-BB4C-21DB2CE80CBA}" type="datetimeFigureOut">
               <a:rPr lang="en-CA" smtClean="0"/>
-              <a:t>2026-02-04</a:t>
+              <a:t>2026-03-13</a:t>
             </a:fld>
             <a:endParaRPr lang="en-CA"/>
           </a:p>
@@ -866,7 +872,7 @@
           <a:p>
             <a:fld id="{38416E33-4BF1-4672-BB4C-21DB2CE80CBA}" type="datetimeFigureOut">
               <a:rPr lang="en-CA" smtClean="0"/>
-              <a:t>2026-02-04</a:t>
+              <a:t>2026-03-13</a:t>
             </a:fld>
             <a:endParaRPr lang="en-CA"/>
           </a:p>
@@ -1142,7 +1148,7 @@
           <a:p>
             <a:fld id="{38416E33-4BF1-4672-BB4C-21DB2CE80CBA}" type="datetimeFigureOut">
               <a:rPr lang="en-CA" smtClean="0"/>
-              <a:t>2026-02-04</a:t>
+              <a:t>2026-03-13</a:t>
             </a:fld>
             <a:endParaRPr lang="en-CA"/>
           </a:p>
@@ -1410,7 +1416,7 @@
           <a:p>
             <a:fld id="{38416E33-4BF1-4672-BB4C-21DB2CE80CBA}" type="datetimeFigureOut">
               <a:rPr lang="en-CA" smtClean="0"/>
-              <a:t>2026-02-04</a:t>
+              <a:t>2026-03-13</a:t>
             </a:fld>
             <a:endParaRPr lang="en-CA"/>
           </a:p>
@@ -1825,7 +1831,7 @@
           <a:p>
             <a:fld id="{38416E33-4BF1-4672-BB4C-21DB2CE80CBA}" type="datetimeFigureOut">
               <a:rPr lang="en-CA" smtClean="0"/>
-              <a:t>2026-02-04</a:t>
+              <a:t>2026-03-13</a:t>
             </a:fld>
             <a:endParaRPr lang="en-CA"/>
           </a:p>
@@ -1967,7 +1973,7 @@
           <a:p>
             <a:fld id="{38416E33-4BF1-4672-BB4C-21DB2CE80CBA}" type="datetimeFigureOut">
               <a:rPr lang="en-CA" smtClean="0"/>
-              <a:t>2026-02-04</a:t>
+              <a:t>2026-03-13</a:t>
             </a:fld>
             <a:endParaRPr lang="en-CA"/>
           </a:p>
@@ -2080,7 +2086,7 @@
           <a:p>
             <a:fld id="{38416E33-4BF1-4672-BB4C-21DB2CE80CBA}" type="datetimeFigureOut">
               <a:rPr lang="en-CA" smtClean="0"/>
-              <a:t>2026-02-04</a:t>
+              <a:t>2026-03-13</a:t>
             </a:fld>
             <a:endParaRPr lang="en-CA"/>
           </a:p>
@@ -2393,7 +2399,7 @@
           <a:p>
             <a:fld id="{38416E33-4BF1-4672-BB4C-21DB2CE80CBA}" type="datetimeFigureOut">
               <a:rPr lang="en-CA" smtClean="0"/>
-              <a:t>2026-02-04</a:t>
+              <a:t>2026-03-13</a:t>
             </a:fld>
             <a:endParaRPr lang="en-CA"/>
           </a:p>
@@ -2682,7 +2688,7 @@
           <a:p>
             <a:fld id="{38416E33-4BF1-4672-BB4C-21DB2CE80CBA}" type="datetimeFigureOut">
               <a:rPr lang="en-CA" smtClean="0"/>
-              <a:t>2026-02-04</a:t>
+              <a:t>2026-03-13</a:t>
             </a:fld>
             <a:endParaRPr lang="en-CA"/>
           </a:p>
@@ -2925,7 +2931,7 @@
           <a:p>
             <a:fld id="{38416E33-4BF1-4672-BB4C-21DB2CE80CBA}" type="datetimeFigureOut">
               <a:rPr lang="en-CA" smtClean="0"/>
-              <a:t>2026-02-04</a:t>
+              <a:t>2026-03-13</a:t>
             </a:fld>
             <a:endParaRPr lang="en-CA"/>
           </a:p>
@@ -3420,8 +3426,8 @@
           </a:fontRef>
         </p:style>
       </p:cxnSp>
-      <mc:AlternateContent xmlns:mc="http://schemas.openxmlformats.org/markup-compatibility/2006">
-        <mc:Choice xmlns:a14="http://schemas.microsoft.com/office/drawing/2010/main" Requires="a14">
+      <mc:AlternateContent xmlns:mc="http://schemas.openxmlformats.org/markup-compatibility/2006" xmlns:a14="http://schemas.microsoft.com/office/drawing/2010/main">
+        <mc:Choice Requires="a14">
           <p:graphicFrame>
             <p:nvGraphicFramePr>
               <p:cNvPr id="13" name="Table 12">
@@ -3502,6 +3508,7 @@
                         <a:bodyPr/>
                         <a:lstStyle/>
                         <a:p>
+                          <a:pPr/>
                           <a14:m>
                             <m:oMathPara xmlns:m="http://schemas.openxmlformats.org/officeDocument/2006/math">
                               <m:oMathParaPr>
@@ -3546,6 +3553,7 @@
                         <a:bodyPr/>
                         <a:lstStyle/>
                         <a:p>
+                          <a:pPr/>
                           <a14:m>
                             <m:oMathPara xmlns:m="http://schemas.openxmlformats.org/officeDocument/2006/math">
                               <m:oMathParaPr>
@@ -3571,6 +3579,7 @@
                         <a:bodyPr/>
                         <a:lstStyle/>
                         <a:p>
+                          <a:pPr/>
                           <a14:m>
                             <m:oMathPara xmlns:m="http://schemas.openxmlformats.org/officeDocument/2006/math">
                               <m:oMathParaPr>
@@ -3966,7 +3975,7 @@
             </a:graphic>
           </p:graphicFrame>
         </mc:Choice>
-        <mc:Fallback>
+        <mc:Fallback xmlns="">
           <p:graphicFrame>
             <p:nvGraphicFramePr>
               <p:cNvPr id="13" name="Table 12">
@@ -4531,8 +4540,8 @@
           </a:p>
         </p:txBody>
       </p:sp>
-      <mc:AlternateContent xmlns:mc="http://schemas.openxmlformats.org/markup-compatibility/2006">
-        <mc:Choice xmlns:a14="http://schemas.microsoft.com/office/drawing/2010/main" Requires="a14">
+      <mc:AlternateContent xmlns:mc="http://schemas.openxmlformats.org/markup-compatibility/2006" xmlns:a14="http://schemas.microsoft.com/office/drawing/2010/main">
+        <mc:Choice Requires="a14">
           <p:sp>
             <p:nvSpPr>
               <p:cNvPr id="18" name="Rectangle: Rounded Corners 17">
@@ -4604,7 +4613,7 @@
             </p:txBody>
           </p:sp>
         </mc:Choice>
-        <mc:Fallback>
+        <mc:Fallback xmlns="">
           <p:sp>
             <p:nvSpPr>
               <p:cNvPr id="18" name="Rectangle: Rounded Corners 17">
@@ -4984,8 +4993,8 @@
           </a:p>
         </p:txBody>
       </p:sp>
-      <mc:AlternateContent xmlns:mc="http://schemas.openxmlformats.org/markup-compatibility/2006">
-        <mc:Choice xmlns:a14="http://schemas.microsoft.com/office/drawing/2010/main" Requires="a14">
+      <mc:AlternateContent xmlns:mc="http://schemas.openxmlformats.org/markup-compatibility/2006" xmlns:a14="http://schemas.microsoft.com/office/drawing/2010/main">
+        <mc:Choice Requires="a14">
           <p:sp>
             <p:nvSpPr>
               <p:cNvPr id="27" name="Rectangle: Rounded Corners 26">
@@ -5061,7 +5070,7 @@
             </p:txBody>
           </p:sp>
         </mc:Choice>
-        <mc:Fallback>
+        <mc:Fallback xmlns="">
           <p:sp>
             <p:nvSpPr>
               <p:cNvPr id="27" name="Rectangle: Rounded Corners 26">
@@ -5156,6 +5165,1881 @@
     <p:extLst>
       <p:ext uri="{BB962C8B-B14F-4D97-AF65-F5344CB8AC3E}">
         <p14:creationId xmlns:p14="http://schemas.microsoft.com/office/powerpoint/2010/main" val="1305975444"/>
+      </p:ext>
+    </p:extLst>
+  </p:cSld>
+  <p:clrMapOvr>
+    <a:masterClrMapping/>
+  </p:clrMapOvr>
+</p:sld>
+</file>
+
+<file path=ppt/slides/slide2.xml><?xml version="1.0" encoding="utf-8"?>
+<p:sld xmlns:a="http://schemas.openxmlformats.org/drawingml/2006/main" xmlns:r="http://schemas.openxmlformats.org/officeDocument/2006/relationships" xmlns:p="http://schemas.openxmlformats.org/presentationml/2006/main">
+  <p:cSld>
+    <p:spTree>
+      <p:nvGrpSpPr>
+        <p:cNvPr id="1" name="">
+          <a:extLst>
+            <a:ext uri="{FF2B5EF4-FFF2-40B4-BE49-F238E27FC236}">
+              <a16:creationId xmlns:a16="http://schemas.microsoft.com/office/drawing/2014/main" id="{BB4931AD-6788-3DD8-B518-C3D757C0C666}"/>
+            </a:ext>
+          </a:extLst>
+        </p:cNvPr>
+        <p:cNvGrpSpPr/>
+        <p:nvPr/>
+      </p:nvGrpSpPr>
+      <p:grpSpPr>
+        <a:xfrm>
+          <a:off x="0" y="0"/>
+          <a:ext cx="0" cy="0"/>
+          <a:chOff x="0" y="0"/>
+          <a:chExt cx="0" cy="0"/>
+        </a:xfrm>
+      </p:grpSpPr>
+      <p:pic>
+        <p:nvPicPr>
+          <p:cNvPr id="7" name="Picture 6">
+            <a:extLst>
+              <a:ext uri="{FF2B5EF4-FFF2-40B4-BE49-F238E27FC236}">
+                <a16:creationId xmlns:a16="http://schemas.microsoft.com/office/drawing/2014/main" id="{F0A1C7CD-31B2-EDB3-14BE-AAAD62D04E90}"/>
+              </a:ext>
+            </a:extLst>
+          </p:cNvPr>
+          <p:cNvPicPr>
+            <a:picLocks noChangeAspect="1"/>
+          </p:cNvPicPr>
+          <p:nvPr/>
+        </p:nvPicPr>
+        <p:blipFill>
+          <a:blip r:embed="rId2">
+            <a:extLst>
+              <a:ext uri="{28A0092B-C50C-407E-A947-70E740481C1C}">
+                <a14:useLocalDpi xmlns:a14="http://schemas.microsoft.com/office/drawing/2010/main" val="0"/>
+              </a:ext>
+            </a:extLst>
+          </a:blip>
+          <a:srcRect/>
+          <a:stretch/>
+        </p:blipFill>
+        <p:spPr>
+          <a:xfrm>
+            <a:off x="1233487" y="203200"/>
+            <a:ext cx="1952625" cy="1219200"/>
+          </a:xfrm>
+          <a:prstGeom prst="rect">
+            <a:avLst/>
+          </a:prstGeom>
+        </p:spPr>
+      </p:pic>
+      <p:cxnSp>
+        <p:nvCxnSpPr>
+          <p:cNvPr id="9" name="Connector: Elbow 8">
+            <a:extLst>
+              <a:ext uri="{FF2B5EF4-FFF2-40B4-BE49-F238E27FC236}">
+                <a16:creationId xmlns:a16="http://schemas.microsoft.com/office/drawing/2014/main" id="{9A7B0A32-A301-BA95-F59B-CD49FE056F2F}"/>
+              </a:ext>
+            </a:extLst>
+          </p:cNvPr>
+          <p:cNvCxnSpPr>
+            <a:cxnSpLocks/>
+          </p:cNvCxnSpPr>
+          <p:nvPr/>
+        </p:nvCxnSpPr>
+        <p:spPr>
+          <a:xfrm rot="16200000" flipH="1">
+            <a:off x="2686050" y="1689100"/>
+            <a:ext cx="1377950" cy="527050"/>
+          </a:xfrm>
+          <a:prstGeom prst="bentConnector3">
+            <a:avLst>
+              <a:gd name="adj1" fmla="val 230"/>
+            </a:avLst>
+          </a:prstGeom>
+          <a:ln>
+            <a:tailEnd type="triangle"/>
+          </a:ln>
+        </p:spPr>
+        <p:style>
+          <a:lnRef idx="2">
+            <a:schemeClr val="accent1"/>
+          </a:lnRef>
+          <a:fillRef idx="0">
+            <a:schemeClr val="accent1"/>
+          </a:fillRef>
+          <a:effectRef idx="1">
+            <a:schemeClr val="accent1"/>
+          </a:effectRef>
+          <a:fontRef idx="minor">
+            <a:schemeClr val="tx1"/>
+          </a:fontRef>
+        </p:style>
+      </p:cxnSp>
+      <mc:AlternateContent xmlns:mc="http://schemas.openxmlformats.org/markup-compatibility/2006">
+        <mc:Choice xmlns:a14="http://schemas.microsoft.com/office/drawing/2010/main" Requires="a14">
+          <p:graphicFrame>
+            <p:nvGraphicFramePr>
+              <p:cNvPr id="13" name="Table 12">
+                <a:extLst>
+                  <a:ext uri="{FF2B5EF4-FFF2-40B4-BE49-F238E27FC236}">
+                    <a16:creationId xmlns:a16="http://schemas.microsoft.com/office/drawing/2014/main" id="{FEC2A08F-77FE-D60F-6666-13C9355B19C1}"/>
+                  </a:ext>
+                </a:extLst>
+              </p:cNvPr>
+              <p:cNvGraphicFramePr>
+                <a:graphicFrameLocks noGrp="1"/>
+              </p:cNvGraphicFramePr>
+              <p:nvPr>
+                <p:extLst>
+                  <p:ext uri="{D42A27DB-BD31-4B8C-83A1-F6EECF244321}">
+                    <p14:modId xmlns:p14="http://schemas.microsoft.com/office/powerpoint/2010/main" val="2790816945"/>
+                  </p:ext>
+                </p:extLst>
+              </p:nvPr>
+            </p:nvGraphicFramePr>
+            <p:xfrm>
+              <a:off x="2340927" y="2730501"/>
+              <a:ext cx="2693671" cy="1485900"/>
+            </p:xfrm>
+            <a:graphic>
+              <a:graphicData uri="http://schemas.openxmlformats.org/drawingml/2006/table">
+                <a:tbl>
+                  <a:tblPr firstRow="1" bandRow="1">
+                    <a:tableStyleId>{5C22544A-7EE6-4342-B048-85BDC9FD1C3A}</a:tableStyleId>
+                  </a:tblPr>
+                  <a:tblGrid>
+                    <a:gridCol w="1249680">
+                      <a:extLst>
+                        <a:ext uri="{9D8B030D-6E8A-4147-A177-3AD203B41FA5}">
+                          <a16:colId xmlns:a16="http://schemas.microsoft.com/office/drawing/2014/main" val="908323738"/>
+                        </a:ext>
+                      </a:extLst>
+                    </a:gridCol>
+                    <a:gridCol w="474980">
+                      <a:extLst>
+                        <a:ext uri="{9D8B030D-6E8A-4147-A177-3AD203B41FA5}">
+                          <a16:colId xmlns:a16="http://schemas.microsoft.com/office/drawing/2014/main" val="2074079731"/>
+                        </a:ext>
+                      </a:extLst>
+                    </a:gridCol>
+                    <a:gridCol w="400368">
+                      <a:extLst>
+                        <a:ext uri="{9D8B030D-6E8A-4147-A177-3AD203B41FA5}">
+                          <a16:colId xmlns:a16="http://schemas.microsoft.com/office/drawing/2014/main" val="2213998483"/>
+                        </a:ext>
+                      </a:extLst>
+                    </a:gridCol>
+                    <a:gridCol w="568643">
+                      <a:extLst>
+                        <a:ext uri="{9D8B030D-6E8A-4147-A177-3AD203B41FA5}">
+                          <a16:colId xmlns:a16="http://schemas.microsoft.com/office/drawing/2014/main" val="987845332"/>
+                        </a:ext>
+                      </a:extLst>
+                    </a:gridCol>
+                  </a:tblGrid>
+                  <a:tr h="371475">
+                    <a:tc>
+                      <a:txBody>
+                        <a:bodyPr/>
+                        <a:lstStyle/>
+                        <a:p>
+                          <a:r>
+                            <a:rPr lang="fr-CA" sz="1100" dirty="0"/>
+                            <a:t>nom</a:t>
+                          </a:r>
+                          <a:endParaRPr lang="en-CA" sz="1100" dirty="0"/>
+                        </a:p>
+                      </a:txBody>
+                      <a:tcPr/>
+                    </a:tc>
+                    <a:tc>
+                      <a:txBody>
+                        <a:bodyPr/>
+                        <a:lstStyle/>
+                        <a:p>
+                          <a:pPr/>
+                          <a14:m>
+                            <m:oMathPara xmlns:m="http://schemas.openxmlformats.org/officeDocument/2006/math">
+                              <m:oMathParaPr>
+                                <m:jc m:val="centerGroup"/>
+                              </m:oMathParaPr>
+                              <m:oMath xmlns:m="http://schemas.openxmlformats.org/officeDocument/2006/math">
+                                <m:sSub>
+                                  <m:sSubPr>
+                                    <m:ctrlPr>
+                                      <a:rPr lang="fr-CA" sz="1100" b="1" i="1" smtClean="0">
+                                        <a:latin typeface="Cambria Math" panose="02040503050406030204" pitchFamily="18" charset="0"/>
+                                      </a:rPr>
+                                    </m:ctrlPr>
+                                  </m:sSubPr>
+                                  <m:e>
+                                    <m:r>
+                                      <a:rPr lang="fr-CA" sz="1100" b="1" i="1" smtClean="0">
+                                        <a:latin typeface="Cambria Math" panose="02040503050406030204" pitchFamily="18" charset="0"/>
+                                      </a:rPr>
+                                      <m:t>𝝉</m:t>
+                                    </m:r>
+                                  </m:e>
+                                  <m:sub>
+                                    <m:r>
+                                      <a:rPr lang="fr-CA" sz="1100" b="1" i="1" smtClean="0">
+                                        <a:latin typeface="Cambria Math" panose="02040503050406030204" pitchFamily="18" charset="0"/>
+                                      </a:rPr>
+                                      <m:t>𝒄</m:t>
+                                    </m:r>
+                                  </m:sub>
+                                </m:sSub>
+                              </m:oMath>
+                            </m:oMathPara>
+                          </a14:m>
+                          <a:endParaRPr lang="en-CA" sz="1100" dirty="0"/>
+                        </a:p>
+                      </a:txBody>
+                      <a:tcPr/>
+                    </a:tc>
+                    <a:tc>
+                      <a:txBody>
+                        <a:bodyPr/>
+                        <a:lstStyle/>
+                        <a:p>
+                          <a:pPr/>
+                          <a14:m>
+                            <m:oMathPara xmlns:m="http://schemas.openxmlformats.org/officeDocument/2006/math">
+                              <m:oMathParaPr>
+                                <m:jc m:val="centerGroup"/>
+                              </m:oMathParaPr>
+                              <m:oMath xmlns:m="http://schemas.openxmlformats.org/officeDocument/2006/math">
+                                <m:r>
+                                  <a:rPr lang="fr-CA" sz="1100" b="1" i="1" smtClean="0">
+                                    <a:latin typeface="Cambria Math" panose="02040503050406030204" pitchFamily="18" charset="0"/>
+                                  </a:rPr>
+                                  <m:t>𝑻</m:t>
+                                </m:r>
+                              </m:oMath>
+                            </m:oMathPara>
+                          </a14:m>
+                          <a:endParaRPr lang="en-CA" sz="1100" dirty="0"/>
+                        </a:p>
+                      </a:txBody>
+                      <a:tcPr/>
+                    </a:tc>
+                    <a:tc>
+                      <a:txBody>
+                        <a:bodyPr/>
+                        <a:lstStyle/>
+                        <a:p>
+                          <a:pPr/>
+                          <a14:m>
+                            <m:oMathPara xmlns:m="http://schemas.openxmlformats.org/officeDocument/2006/math">
+                              <m:oMathParaPr>
+                                <m:jc m:val="centerGroup"/>
+                              </m:oMathParaPr>
+                              <m:oMath xmlns:m="http://schemas.openxmlformats.org/officeDocument/2006/math">
+                                <m:sSub>
+                                  <m:sSubPr>
+                                    <m:ctrlPr>
+                                      <a:rPr lang="fr-CA" sz="1100" b="1" i="1" smtClean="0">
+                                        <a:latin typeface="Cambria Math" panose="02040503050406030204" pitchFamily="18" charset="0"/>
+                                      </a:rPr>
+                                    </m:ctrlPr>
+                                  </m:sSubPr>
+                                  <m:e>
+                                    <m:r>
+                                      <a:rPr lang="fr-CA" sz="1100" b="1" i="1" smtClean="0">
+                                        <a:latin typeface="Cambria Math" panose="02040503050406030204" pitchFamily="18" charset="0"/>
+                                      </a:rPr>
+                                      <m:t>𝒈</m:t>
+                                    </m:r>
+                                  </m:e>
+                                  <m:sub>
+                                    <m:r>
+                                      <a:rPr lang="fr-CA" sz="1100" b="1" i="1" smtClean="0">
+                                        <a:latin typeface="Cambria Math" panose="02040503050406030204" pitchFamily="18" charset="0"/>
+                                      </a:rPr>
+                                      <m:t>𝟏</m:t>
+                                    </m:r>
+                                  </m:sub>
+                                </m:sSub>
+                              </m:oMath>
+                            </m:oMathPara>
+                          </a14:m>
+                          <a:endParaRPr lang="en-CA" sz="1100" dirty="0"/>
+                        </a:p>
+                      </a:txBody>
+                      <a:tcPr/>
+                    </a:tc>
+                    <a:extLst>
+                      <a:ext uri="{0D108BD9-81ED-4DB2-BD59-A6C34878D82A}">
+                        <a16:rowId xmlns:a16="http://schemas.microsoft.com/office/drawing/2014/main" val="690050692"/>
+                      </a:ext>
+                    </a:extLst>
+                  </a:tr>
+                  <a:tr h="371475">
+                    <a:tc>
+                      <a:txBody>
+                        <a:bodyPr/>
+                        <a:lstStyle/>
+                        <a:p>
+                          <a:r>
+                            <a:rPr lang="fr-CA" sz="1100" dirty="0">
+                              <a:latin typeface="Consolas" panose="020B0609020204030204" pitchFamily="49" charset="0"/>
+                            </a:rPr>
+                            <a:t>speckle_1.npy</a:t>
+                          </a:r>
+                          <a:endParaRPr lang="en-CA" sz="1100" dirty="0">
+                            <a:latin typeface="Consolas" panose="020B0609020204030204" pitchFamily="49" charset="0"/>
+                          </a:endParaRPr>
+                        </a:p>
+                      </a:txBody>
+                      <a:tcPr/>
+                    </a:tc>
+                    <a:tc>
+                      <a:txBody>
+                        <a:bodyPr/>
+                        <a:lstStyle/>
+                        <a:p>
+                          <a:r>
+                            <a:rPr lang="fr-CA" sz="1100" dirty="0"/>
+                            <a:t>0.03</a:t>
+                          </a:r>
+                          <a:endParaRPr lang="en-CA" sz="1100" dirty="0"/>
+                        </a:p>
+                      </a:txBody>
+                      <a:tcPr/>
+                    </a:tc>
+                    <a:tc>
+                      <a:txBody>
+                        <a:bodyPr/>
+                        <a:lstStyle/>
+                        <a:p>
+                          <a:r>
+                            <a:rPr lang="fr-CA" sz="1100" dirty="0"/>
+                            <a:t>1.0</a:t>
+                          </a:r>
+                          <a:endParaRPr lang="en-CA" sz="1100" dirty="0"/>
+                        </a:p>
+                      </a:txBody>
+                      <a:tcPr/>
+                    </a:tc>
+                    <a:tc>
+                      <a:txBody>
+                        <a:bodyPr/>
+                        <a:lstStyle/>
+                        <a:p>
+                          <a:r>
+                            <a:rPr lang="fr-CA" sz="1100" dirty="0" err="1"/>
+                            <a:t>exp</a:t>
+                          </a:r>
+                          <a:endParaRPr lang="en-CA" sz="1100" dirty="0"/>
+                        </a:p>
+                      </a:txBody>
+                      <a:tcPr/>
+                    </a:tc>
+                    <a:extLst>
+                      <a:ext uri="{0D108BD9-81ED-4DB2-BD59-A6C34878D82A}">
+                        <a16:rowId xmlns:a16="http://schemas.microsoft.com/office/drawing/2014/main" val="3651626624"/>
+                      </a:ext>
+                    </a:extLst>
+                  </a:tr>
+                  <a:tr h="371475">
+                    <a:tc>
+                      <a:txBody>
+                        <a:bodyPr/>
+                        <a:lstStyle/>
+                        <a:p>
+                          <a:r>
+                            <a:rPr lang="fr-CA" sz="1100" dirty="0">
+                              <a:latin typeface="Consolas" panose="020B0609020204030204" pitchFamily="49" charset="0"/>
+                            </a:rPr>
+                            <a:t>speckle_2.npy</a:t>
+                          </a:r>
+                          <a:endParaRPr lang="en-CA" sz="1100" dirty="0">
+                            <a:latin typeface="Consolas" panose="020B0609020204030204" pitchFamily="49" charset="0"/>
+                          </a:endParaRPr>
+                        </a:p>
+                      </a:txBody>
+                      <a:tcPr/>
+                    </a:tc>
+                    <a:tc>
+                      <a:txBody>
+                        <a:bodyPr/>
+                        <a:lstStyle/>
+                        <a:p>
+                          <a:r>
+                            <a:rPr lang="fr-CA" sz="1100" dirty="0"/>
+                            <a:t>0.03</a:t>
+                          </a:r>
+                          <a:endParaRPr lang="en-CA" sz="1100" dirty="0"/>
+                        </a:p>
+                      </a:txBody>
+                      <a:tcPr/>
+                    </a:tc>
+                    <a:tc>
+                      <a:txBody>
+                        <a:bodyPr/>
+                        <a:lstStyle/>
+                        <a:p>
+                          <a:r>
+                            <a:rPr lang="fr-CA" sz="1100" dirty="0"/>
+                            <a:t>1.0</a:t>
+                          </a:r>
+                          <a:endParaRPr lang="en-CA" sz="1100" dirty="0"/>
+                        </a:p>
+                      </a:txBody>
+                      <a:tcPr/>
+                    </a:tc>
+                    <a:tc>
+                      <a:txBody>
+                        <a:bodyPr/>
+                        <a:lstStyle/>
+                        <a:p>
+                          <a:r>
+                            <a:rPr lang="fr-CA" sz="1100" dirty="0" err="1"/>
+                            <a:t>exp</a:t>
+                          </a:r>
+                          <a:endParaRPr lang="en-CA" sz="1100" dirty="0"/>
+                        </a:p>
+                      </a:txBody>
+                      <a:tcPr/>
+                    </a:tc>
+                    <a:extLst>
+                      <a:ext uri="{0D108BD9-81ED-4DB2-BD59-A6C34878D82A}">
+                        <a16:rowId xmlns:a16="http://schemas.microsoft.com/office/drawing/2014/main" val="549134864"/>
+                      </a:ext>
+                    </a:extLst>
+                  </a:tr>
+                  <a:tr h="371475">
+                    <a:tc>
+                      <a:txBody>
+                        <a:bodyPr/>
+                        <a:lstStyle/>
+                        <a:p>
+                          <a:pPr marL="0" marR="0" lvl="0" indent="0" algn="l" defTabSz="914400" rtl="0" eaLnBrk="1" fontAlgn="auto" latinLnBrk="0" hangingPunct="1">
+                            <a:lnSpc>
+                              <a:spcPct val="100000"/>
+                            </a:lnSpc>
+                            <a:spcBef>
+                              <a:spcPts val="0"/>
+                            </a:spcBef>
+                            <a:spcAft>
+                              <a:spcPts val="0"/>
+                            </a:spcAft>
+                            <a:buClrTx/>
+                            <a:buSzTx/>
+                            <a:buFontTx/>
+                            <a:buNone/>
+                            <a:tabLst/>
+                            <a:defRPr/>
+                          </a:pPr>
+                          <a14:m>
+                            <m:oMathPara xmlns:m="http://schemas.openxmlformats.org/officeDocument/2006/math">
+                              <m:oMathParaPr>
+                                <m:jc m:val="centerGroup"/>
+                              </m:oMathParaPr>
+                              <m:oMath xmlns:m="http://schemas.openxmlformats.org/officeDocument/2006/math">
+                                <m:r>
+                                  <a:rPr kumimoji="0" lang="en-CA" sz="1100" b="0" i="1" u="none" strike="noStrike" kern="1200" cap="none" spc="0" normalizeH="0" baseline="0" noProof="0" smtClean="0">
+                                    <a:ln>
+                                      <a:noFill/>
+                                    </a:ln>
+                                    <a:solidFill>
+                                      <a:prstClr val="black"/>
+                                    </a:solidFill>
+                                    <a:effectLst/>
+                                    <a:uLnTx/>
+                                    <a:uFillTx/>
+                                    <a:latin typeface="Cambria Math" panose="02040503050406030204" pitchFamily="18" charset="0"/>
+                                    <a:ea typeface="+mn-ea"/>
+                                    <a:cs typeface="+mn-cs"/>
+                                  </a:rPr>
+                                  <m:t>⋮</m:t>
+                                </m:r>
+                              </m:oMath>
+                            </m:oMathPara>
+                          </a14:m>
+                          <a:endParaRPr kumimoji="0" lang="en-CA" sz="1100" b="0" i="0" u="none" strike="noStrike" kern="1200" cap="none" spc="0" normalizeH="0" baseline="0" noProof="0" dirty="0">
+                            <a:ln>
+                              <a:noFill/>
+                            </a:ln>
+                            <a:solidFill>
+                              <a:prstClr val="black"/>
+                            </a:solidFill>
+                            <a:effectLst/>
+                            <a:uLnTx/>
+                            <a:uFillTx/>
+                            <a:latin typeface="Consolas" panose="020B0609020204030204" pitchFamily="49" charset="0"/>
+                            <a:ea typeface="+mn-ea"/>
+                            <a:cs typeface="+mn-cs"/>
+                          </a:endParaRPr>
+                        </a:p>
+                      </a:txBody>
+                      <a:tcPr/>
+                    </a:tc>
+                    <a:tc>
+                      <a:txBody>
+                        <a:bodyPr/>
+                        <a:lstStyle/>
+                        <a:p>
+                          <a:pPr marL="0" marR="0" lvl="0" indent="0" algn="l" defTabSz="914400" rtl="0" eaLnBrk="1" fontAlgn="auto" latinLnBrk="0" hangingPunct="1">
+                            <a:lnSpc>
+                              <a:spcPct val="100000"/>
+                            </a:lnSpc>
+                            <a:spcBef>
+                              <a:spcPts val="0"/>
+                            </a:spcBef>
+                            <a:spcAft>
+                              <a:spcPts val="0"/>
+                            </a:spcAft>
+                            <a:buClrTx/>
+                            <a:buSzTx/>
+                            <a:buFontTx/>
+                            <a:buNone/>
+                            <a:tabLst/>
+                            <a:defRPr/>
+                          </a:pPr>
+                          <a14:m>
+                            <m:oMathPara xmlns:m="http://schemas.openxmlformats.org/officeDocument/2006/math">
+                              <m:oMathParaPr>
+                                <m:jc m:val="centerGroup"/>
+                              </m:oMathParaPr>
+                              <m:oMath xmlns:m="http://schemas.openxmlformats.org/officeDocument/2006/math">
+                                <m:r>
+                                  <a:rPr kumimoji="0" lang="en-CA" sz="1100" b="0" i="1" u="none" strike="noStrike" kern="1200" cap="none" spc="0" normalizeH="0" baseline="0" noProof="0" smtClean="0">
+                                    <a:ln>
+                                      <a:noFill/>
+                                    </a:ln>
+                                    <a:solidFill>
+                                      <a:prstClr val="black"/>
+                                    </a:solidFill>
+                                    <a:effectLst/>
+                                    <a:uLnTx/>
+                                    <a:uFillTx/>
+                                    <a:latin typeface="Cambria Math" panose="02040503050406030204" pitchFamily="18" charset="0"/>
+                                    <a:ea typeface="+mn-ea"/>
+                                    <a:cs typeface="+mn-cs"/>
+                                  </a:rPr>
+                                  <m:t>⋮</m:t>
+                                </m:r>
+                              </m:oMath>
+                            </m:oMathPara>
+                          </a14:m>
+                          <a:endParaRPr kumimoji="0" lang="en-CA" sz="1100" b="0" i="0" u="none" strike="noStrike" kern="1200" cap="none" spc="0" normalizeH="0" baseline="0" noProof="0" dirty="0">
+                            <a:ln>
+                              <a:noFill/>
+                            </a:ln>
+                            <a:solidFill>
+                              <a:prstClr val="black"/>
+                            </a:solidFill>
+                            <a:effectLst/>
+                            <a:uLnTx/>
+                            <a:uFillTx/>
+                            <a:latin typeface="Consolas" panose="020B0609020204030204" pitchFamily="49" charset="0"/>
+                            <a:ea typeface="+mn-ea"/>
+                            <a:cs typeface="+mn-cs"/>
+                          </a:endParaRPr>
+                        </a:p>
+                      </a:txBody>
+                      <a:tcPr/>
+                    </a:tc>
+                    <a:tc>
+                      <a:txBody>
+                        <a:bodyPr/>
+                        <a:lstStyle/>
+                        <a:p>
+                          <a:pPr/>
+                          <a14:m>
+                            <m:oMathPara xmlns:m="http://schemas.openxmlformats.org/officeDocument/2006/math">
+                              <m:oMathParaPr>
+                                <m:jc m:val="centerGroup"/>
+                              </m:oMathParaPr>
+                              <m:oMath xmlns:m="http://schemas.openxmlformats.org/officeDocument/2006/math">
+                                <m:r>
+                                  <a:rPr lang="en-CA" sz="1100" i="1" smtClean="0">
+                                    <a:latin typeface="Cambria Math" panose="02040503050406030204" pitchFamily="18" charset="0"/>
+                                  </a:rPr>
+                                  <m:t>⋮</m:t>
+                                </m:r>
+                              </m:oMath>
+                            </m:oMathPara>
+                          </a14:m>
+                          <a:endParaRPr lang="en-CA" sz="1100" dirty="0">
+                            <a:latin typeface="Consolas" panose="020B0609020204030204" pitchFamily="49" charset="0"/>
+                          </a:endParaRPr>
+                        </a:p>
+                      </a:txBody>
+                      <a:tcPr/>
+                    </a:tc>
+                    <a:tc>
+                      <a:txBody>
+                        <a:bodyPr/>
+                        <a:lstStyle/>
+                        <a:p>
+                          <a:pPr marL="0" marR="0" lvl="0" indent="0" algn="l" defTabSz="914400" rtl="0" eaLnBrk="1" fontAlgn="auto" latinLnBrk="0" hangingPunct="1">
+                            <a:lnSpc>
+                              <a:spcPct val="100000"/>
+                            </a:lnSpc>
+                            <a:spcBef>
+                              <a:spcPts val="0"/>
+                            </a:spcBef>
+                            <a:spcAft>
+                              <a:spcPts val="0"/>
+                            </a:spcAft>
+                            <a:buClrTx/>
+                            <a:buSzTx/>
+                            <a:buFontTx/>
+                            <a:buNone/>
+                            <a:tabLst/>
+                            <a:defRPr/>
+                          </a:pPr>
+                          <a14:m>
+                            <m:oMathPara xmlns:m="http://schemas.openxmlformats.org/officeDocument/2006/math">
+                              <m:oMathParaPr>
+                                <m:jc m:val="centerGroup"/>
+                              </m:oMathParaPr>
+                              <m:oMath xmlns:m="http://schemas.openxmlformats.org/officeDocument/2006/math">
+                                <m:r>
+                                  <a:rPr lang="en-CA" sz="1100" i="1" smtClean="0">
+                                    <a:latin typeface="Cambria Math" panose="02040503050406030204" pitchFamily="18" charset="0"/>
+                                  </a:rPr>
+                                  <m:t>⋮</m:t>
+                                </m:r>
+                              </m:oMath>
+                            </m:oMathPara>
+                          </a14:m>
+                          <a:endParaRPr lang="en-CA" sz="1100" dirty="0">
+                            <a:latin typeface="Consolas" panose="020B0609020204030204" pitchFamily="49" charset="0"/>
+                          </a:endParaRPr>
+                        </a:p>
+                      </a:txBody>
+                      <a:tcPr/>
+                    </a:tc>
+                    <a:extLst>
+                      <a:ext uri="{0D108BD9-81ED-4DB2-BD59-A6C34878D82A}">
+                        <a16:rowId xmlns:a16="http://schemas.microsoft.com/office/drawing/2014/main" val="151901722"/>
+                      </a:ext>
+                    </a:extLst>
+                  </a:tr>
+                </a:tbl>
+              </a:graphicData>
+            </a:graphic>
+          </p:graphicFrame>
+        </mc:Choice>
+        <mc:Fallback>
+          <p:graphicFrame>
+            <p:nvGraphicFramePr>
+              <p:cNvPr id="13" name="Table 12">
+                <a:extLst>
+                  <a:ext uri="{FF2B5EF4-FFF2-40B4-BE49-F238E27FC236}">
+                    <a16:creationId xmlns:a16="http://schemas.microsoft.com/office/drawing/2014/main" id="{FEC2A08F-77FE-D60F-6666-13C9355B19C1}"/>
+                  </a:ext>
+                </a:extLst>
+              </p:cNvPr>
+              <p:cNvGraphicFramePr>
+                <a:graphicFrameLocks noGrp="1"/>
+              </p:cNvGraphicFramePr>
+              <p:nvPr>
+                <p:extLst>
+                  <p:ext uri="{D42A27DB-BD31-4B8C-83A1-F6EECF244321}">
+                    <p14:modId xmlns:p14="http://schemas.microsoft.com/office/powerpoint/2010/main" val="2790816945"/>
+                  </p:ext>
+                </p:extLst>
+              </p:nvPr>
+            </p:nvGraphicFramePr>
+            <p:xfrm>
+              <a:off x="2340927" y="2730501"/>
+              <a:ext cx="2693671" cy="1485900"/>
+            </p:xfrm>
+            <a:graphic>
+              <a:graphicData uri="http://schemas.openxmlformats.org/drawingml/2006/table">
+                <a:tbl>
+                  <a:tblPr firstRow="1" bandRow="1">
+                    <a:tableStyleId>{5C22544A-7EE6-4342-B048-85BDC9FD1C3A}</a:tableStyleId>
+                  </a:tblPr>
+                  <a:tblGrid>
+                    <a:gridCol w="1249680">
+                      <a:extLst>
+                        <a:ext uri="{9D8B030D-6E8A-4147-A177-3AD203B41FA5}">
+                          <a16:colId xmlns:a16="http://schemas.microsoft.com/office/drawing/2014/main" val="908323738"/>
+                        </a:ext>
+                      </a:extLst>
+                    </a:gridCol>
+                    <a:gridCol w="474980">
+                      <a:extLst>
+                        <a:ext uri="{9D8B030D-6E8A-4147-A177-3AD203B41FA5}">
+                          <a16:colId xmlns:a16="http://schemas.microsoft.com/office/drawing/2014/main" val="2074079731"/>
+                        </a:ext>
+                      </a:extLst>
+                    </a:gridCol>
+                    <a:gridCol w="400368">
+                      <a:extLst>
+                        <a:ext uri="{9D8B030D-6E8A-4147-A177-3AD203B41FA5}">
+                          <a16:colId xmlns:a16="http://schemas.microsoft.com/office/drawing/2014/main" val="2213998483"/>
+                        </a:ext>
+                      </a:extLst>
+                    </a:gridCol>
+                    <a:gridCol w="568643">
+                      <a:extLst>
+                        <a:ext uri="{9D8B030D-6E8A-4147-A177-3AD203B41FA5}">
+                          <a16:colId xmlns:a16="http://schemas.microsoft.com/office/drawing/2014/main" val="987845332"/>
+                        </a:ext>
+                      </a:extLst>
+                    </a:gridCol>
+                  </a:tblGrid>
+                  <a:tr h="371475">
+                    <a:tc>
+                      <a:txBody>
+                        <a:bodyPr/>
+                        <a:lstStyle/>
+                        <a:p>
+                          <a:r>
+                            <a:rPr lang="fr-CA" sz="1100" dirty="0"/>
+                            <a:t>nom</a:t>
+                          </a:r>
+                          <a:endParaRPr lang="en-CA" sz="1100" dirty="0"/>
+                        </a:p>
+                      </a:txBody>
+                      <a:tcPr/>
+                    </a:tc>
+                    <a:tc>
+                      <a:txBody>
+                        <a:bodyPr/>
+                        <a:lstStyle/>
+                        <a:p>
+                          <a:endParaRPr lang="en-US"/>
+                        </a:p>
+                      </a:txBody>
+                      <a:tcPr>
+                        <a:blipFill>
+                          <a:blip r:embed="rId3"/>
+                          <a:stretch>
+                            <a:fillRect l="-265385" t="-1639" r="-210256" b="-304918"/>
+                          </a:stretch>
+                        </a:blipFill>
+                      </a:tcPr>
+                    </a:tc>
+                    <a:tc>
+                      <a:txBody>
+                        <a:bodyPr/>
+                        <a:lstStyle/>
+                        <a:p>
+                          <a:endParaRPr lang="en-US"/>
+                        </a:p>
+                      </a:txBody>
+                      <a:tcPr>
+                        <a:blipFill>
+                          <a:blip r:embed="rId3"/>
+                          <a:stretch>
+                            <a:fillRect l="-431818" t="-1639" r="-148485" b="-304918"/>
+                          </a:stretch>
+                        </a:blipFill>
+                      </a:tcPr>
+                    </a:tc>
+                    <a:tc>
+                      <a:txBody>
+                        <a:bodyPr/>
+                        <a:lstStyle/>
+                        <a:p>
+                          <a:endParaRPr lang="en-US"/>
+                        </a:p>
+                      </a:txBody>
+                      <a:tcPr>
+                        <a:blipFill>
+                          <a:blip r:embed="rId3"/>
+                          <a:stretch>
+                            <a:fillRect l="-377419" t="-1639" r="-5376" b="-304918"/>
+                          </a:stretch>
+                        </a:blipFill>
+                      </a:tcPr>
+                    </a:tc>
+                    <a:extLst>
+                      <a:ext uri="{0D108BD9-81ED-4DB2-BD59-A6C34878D82A}">
+                        <a16:rowId xmlns:a16="http://schemas.microsoft.com/office/drawing/2014/main" val="690050692"/>
+                      </a:ext>
+                    </a:extLst>
+                  </a:tr>
+                  <a:tr h="371475">
+                    <a:tc>
+                      <a:txBody>
+                        <a:bodyPr/>
+                        <a:lstStyle/>
+                        <a:p>
+                          <a:r>
+                            <a:rPr lang="fr-CA" sz="1100" dirty="0">
+                              <a:latin typeface="Consolas" panose="020B0609020204030204" pitchFamily="49" charset="0"/>
+                            </a:rPr>
+                            <a:t>speckle_1.npy</a:t>
+                          </a:r>
+                          <a:endParaRPr lang="en-CA" sz="1100" dirty="0">
+                            <a:latin typeface="Consolas" panose="020B0609020204030204" pitchFamily="49" charset="0"/>
+                          </a:endParaRPr>
+                        </a:p>
+                      </a:txBody>
+                      <a:tcPr/>
+                    </a:tc>
+                    <a:tc>
+                      <a:txBody>
+                        <a:bodyPr/>
+                        <a:lstStyle/>
+                        <a:p>
+                          <a:r>
+                            <a:rPr lang="fr-CA" sz="1100" dirty="0"/>
+                            <a:t>0.03</a:t>
+                          </a:r>
+                          <a:endParaRPr lang="en-CA" sz="1100" dirty="0"/>
+                        </a:p>
+                      </a:txBody>
+                      <a:tcPr/>
+                    </a:tc>
+                    <a:tc>
+                      <a:txBody>
+                        <a:bodyPr/>
+                        <a:lstStyle/>
+                        <a:p>
+                          <a:r>
+                            <a:rPr lang="fr-CA" sz="1100" dirty="0"/>
+                            <a:t>1.0</a:t>
+                          </a:r>
+                          <a:endParaRPr lang="en-CA" sz="1100" dirty="0"/>
+                        </a:p>
+                      </a:txBody>
+                      <a:tcPr/>
+                    </a:tc>
+                    <a:tc>
+                      <a:txBody>
+                        <a:bodyPr/>
+                        <a:lstStyle/>
+                        <a:p>
+                          <a:r>
+                            <a:rPr lang="fr-CA" sz="1100" dirty="0" err="1"/>
+                            <a:t>exp</a:t>
+                          </a:r>
+                          <a:endParaRPr lang="en-CA" sz="1100" dirty="0"/>
+                        </a:p>
+                      </a:txBody>
+                      <a:tcPr/>
+                    </a:tc>
+                    <a:extLst>
+                      <a:ext uri="{0D108BD9-81ED-4DB2-BD59-A6C34878D82A}">
+                        <a16:rowId xmlns:a16="http://schemas.microsoft.com/office/drawing/2014/main" val="3651626624"/>
+                      </a:ext>
+                    </a:extLst>
+                  </a:tr>
+                  <a:tr h="371475">
+                    <a:tc>
+                      <a:txBody>
+                        <a:bodyPr/>
+                        <a:lstStyle/>
+                        <a:p>
+                          <a:r>
+                            <a:rPr lang="fr-CA" sz="1100" dirty="0">
+                              <a:latin typeface="Consolas" panose="020B0609020204030204" pitchFamily="49" charset="0"/>
+                            </a:rPr>
+                            <a:t>speckle_2.npy</a:t>
+                          </a:r>
+                          <a:endParaRPr lang="en-CA" sz="1100" dirty="0">
+                            <a:latin typeface="Consolas" panose="020B0609020204030204" pitchFamily="49" charset="0"/>
+                          </a:endParaRPr>
+                        </a:p>
+                      </a:txBody>
+                      <a:tcPr/>
+                    </a:tc>
+                    <a:tc>
+                      <a:txBody>
+                        <a:bodyPr/>
+                        <a:lstStyle/>
+                        <a:p>
+                          <a:r>
+                            <a:rPr lang="fr-CA" sz="1100" dirty="0"/>
+                            <a:t>0.03</a:t>
+                          </a:r>
+                          <a:endParaRPr lang="en-CA" sz="1100" dirty="0"/>
+                        </a:p>
+                      </a:txBody>
+                      <a:tcPr/>
+                    </a:tc>
+                    <a:tc>
+                      <a:txBody>
+                        <a:bodyPr/>
+                        <a:lstStyle/>
+                        <a:p>
+                          <a:r>
+                            <a:rPr lang="fr-CA" sz="1100" dirty="0"/>
+                            <a:t>1.0</a:t>
+                          </a:r>
+                          <a:endParaRPr lang="en-CA" sz="1100" dirty="0"/>
+                        </a:p>
+                      </a:txBody>
+                      <a:tcPr/>
+                    </a:tc>
+                    <a:tc>
+                      <a:txBody>
+                        <a:bodyPr/>
+                        <a:lstStyle/>
+                        <a:p>
+                          <a:r>
+                            <a:rPr lang="fr-CA" sz="1100" dirty="0" err="1"/>
+                            <a:t>exp</a:t>
+                          </a:r>
+                          <a:endParaRPr lang="en-CA" sz="1100" dirty="0"/>
+                        </a:p>
+                      </a:txBody>
+                      <a:tcPr/>
+                    </a:tc>
+                    <a:extLst>
+                      <a:ext uri="{0D108BD9-81ED-4DB2-BD59-A6C34878D82A}">
+                        <a16:rowId xmlns:a16="http://schemas.microsoft.com/office/drawing/2014/main" val="549134864"/>
+                      </a:ext>
+                    </a:extLst>
+                  </a:tr>
+                  <a:tr h="371475">
+                    <a:tc>
+                      <a:txBody>
+                        <a:bodyPr/>
+                        <a:lstStyle/>
+                        <a:p>
+                          <a:endParaRPr lang="en-US"/>
+                        </a:p>
+                      </a:txBody>
+                      <a:tcPr>
+                        <a:blipFill>
+                          <a:blip r:embed="rId3"/>
+                          <a:stretch>
+                            <a:fillRect l="-976" t="-303279" r="-118049" b="-3279"/>
+                          </a:stretch>
+                        </a:blipFill>
+                      </a:tcPr>
+                    </a:tc>
+                    <a:tc>
+                      <a:txBody>
+                        <a:bodyPr/>
+                        <a:lstStyle/>
+                        <a:p>
+                          <a:endParaRPr lang="en-US"/>
+                        </a:p>
+                      </a:txBody>
+                      <a:tcPr>
+                        <a:blipFill>
+                          <a:blip r:embed="rId3"/>
+                          <a:stretch>
+                            <a:fillRect l="-265385" t="-303279" r="-210256" b="-3279"/>
+                          </a:stretch>
+                        </a:blipFill>
+                      </a:tcPr>
+                    </a:tc>
+                    <a:tc>
+                      <a:txBody>
+                        <a:bodyPr/>
+                        <a:lstStyle/>
+                        <a:p>
+                          <a:endParaRPr lang="en-US"/>
+                        </a:p>
+                      </a:txBody>
+                      <a:tcPr>
+                        <a:blipFill>
+                          <a:blip r:embed="rId3"/>
+                          <a:stretch>
+                            <a:fillRect l="-431818" t="-303279" r="-148485" b="-3279"/>
+                          </a:stretch>
+                        </a:blipFill>
+                      </a:tcPr>
+                    </a:tc>
+                    <a:tc>
+                      <a:txBody>
+                        <a:bodyPr/>
+                        <a:lstStyle/>
+                        <a:p>
+                          <a:endParaRPr lang="en-US"/>
+                        </a:p>
+                      </a:txBody>
+                      <a:tcPr>
+                        <a:blipFill>
+                          <a:blip r:embed="rId3"/>
+                          <a:stretch>
+                            <a:fillRect l="-377419" t="-303279" r="-5376" b="-3279"/>
+                          </a:stretch>
+                        </a:blipFill>
+                      </a:tcPr>
+                    </a:tc>
+                    <a:extLst>
+                      <a:ext uri="{0D108BD9-81ED-4DB2-BD59-A6C34878D82A}">
+                        <a16:rowId xmlns:a16="http://schemas.microsoft.com/office/drawing/2014/main" val="151901722"/>
+                      </a:ext>
+                    </a:extLst>
+                  </a:tr>
+                </a:tbl>
+              </a:graphicData>
+            </a:graphic>
+          </p:graphicFrame>
+        </mc:Fallback>
+      </mc:AlternateContent>
+      <p:sp>
+        <p:nvSpPr>
+          <p:cNvPr id="14" name="Arrow: Right 13">
+            <a:extLst>
+              <a:ext uri="{FF2B5EF4-FFF2-40B4-BE49-F238E27FC236}">
+                <a16:creationId xmlns:a16="http://schemas.microsoft.com/office/drawing/2014/main" id="{CCF293AD-4611-006E-E431-8B66D9BD3CF6}"/>
+              </a:ext>
+            </a:extLst>
+          </p:cNvPr>
+          <p:cNvSpPr/>
+          <p:nvPr/>
+        </p:nvSpPr>
+        <p:spPr>
+          <a:xfrm>
+            <a:off x="3186112" y="485776"/>
+            <a:ext cx="2319338" cy="654050"/>
+          </a:xfrm>
+          <a:prstGeom prst="rightArrow">
+            <a:avLst/>
+          </a:prstGeom>
+        </p:spPr>
+        <p:style>
+          <a:lnRef idx="2">
+            <a:schemeClr val="accent3">
+              <a:shade val="15000"/>
+            </a:schemeClr>
+          </a:lnRef>
+          <a:fillRef idx="1">
+            <a:schemeClr val="accent3"/>
+          </a:fillRef>
+          <a:effectRef idx="0">
+            <a:schemeClr val="accent3"/>
+          </a:effectRef>
+          <a:fontRef idx="minor">
+            <a:schemeClr val="lt1"/>
+          </a:fontRef>
+        </p:style>
+        <p:txBody>
+          <a:bodyPr rtlCol="0" anchor="ctr"/>
+          <a:lstStyle/>
+          <a:p>
+            <a:pPr algn="ctr"/>
+            <a:endParaRPr lang="en-CA"/>
+          </a:p>
+        </p:txBody>
+      </p:sp>
+      <p:sp>
+        <p:nvSpPr>
+          <p:cNvPr id="15" name="Rectangle: Rounded Corners 14">
+            <a:extLst>
+              <a:ext uri="{FF2B5EF4-FFF2-40B4-BE49-F238E27FC236}">
+                <a16:creationId xmlns:a16="http://schemas.microsoft.com/office/drawing/2014/main" id="{51E0E7B7-BC4A-838E-A4F4-D0DEDFB5E2A0}"/>
+              </a:ext>
+            </a:extLst>
+          </p:cNvPr>
+          <p:cNvSpPr/>
+          <p:nvPr/>
+        </p:nvSpPr>
+        <p:spPr>
+          <a:xfrm>
+            <a:off x="5899150" y="485775"/>
+            <a:ext cx="2724150" cy="654050"/>
+          </a:xfrm>
+          <a:prstGeom prst="roundRect">
+            <a:avLst/>
+          </a:prstGeom>
+        </p:spPr>
+        <p:style>
+          <a:lnRef idx="2">
+            <a:schemeClr val="accent3">
+              <a:shade val="15000"/>
+            </a:schemeClr>
+          </a:lnRef>
+          <a:fillRef idx="1">
+            <a:schemeClr val="accent3"/>
+          </a:fillRef>
+          <a:effectRef idx="0">
+            <a:schemeClr val="accent3"/>
+          </a:effectRef>
+          <a:fontRef idx="minor">
+            <a:schemeClr val="lt1"/>
+          </a:fontRef>
+        </p:style>
+        <p:txBody>
+          <a:bodyPr rtlCol="0" anchor="ctr"/>
+          <a:lstStyle/>
+          <a:p>
+            <a:pPr algn="ctr"/>
+            <a:r>
+              <a:rPr lang="fr-CA" sz="1600" dirty="0" err="1"/>
+              <a:t>DataLoader</a:t>
+            </a:r>
+            <a:r>
+              <a:rPr lang="fr-CA" sz="1600" dirty="0"/>
+              <a:t> / </a:t>
+            </a:r>
+            <a:r>
+              <a:rPr lang="fr-CA" sz="1600" dirty="0" err="1"/>
+              <a:t>Dataset</a:t>
+            </a:r>
+            <a:endParaRPr lang="en-CA" sz="1600" dirty="0"/>
+          </a:p>
+        </p:txBody>
+      </p:sp>
+      <p:sp>
+        <p:nvSpPr>
+          <p:cNvPr id="16" name="Arrow: Right 15">
+            <a:extLst>
+              <a:ext uri="{FF2B5EF4-FFF2-40B4-BE49-F238E27FC236}">
+                <a16:creationId xmlns:a16="http://schemas.microsoft.com/office/drawing/2014/main" id="{5B93CE2C-A399-1AF9-D8B1-EAC5F981A716}"/>
+              </a:ext>
+            </a:extLst>
+          </p:cNvPr>
+          <p:cNvSpPr/>
+          <p:nvPr/>
+        </p:nvSpPr>
+        <p:spPr>
+          <a:xfrm rot="5400000">
+            <a:off x="6759575" y="1438275"/>
+            <a:ext cx="1003300" cy="654050"/>
+          </a:xfrm>
+          <a:prstGeom prst="rightArrow">
+            <a:avLst/>
+          </a:prstGeom>
+        </p:spPr>
+        <p:style>
+          <a:lnRef idx="2">
+            <a:schemeClr val="accent3">
+              <a:shade val="15000"/>
+            </a:schemeClr>
+          </a:lnRef>
+          <a:fillRef idx="1">
+            <a:schemeClr val="accent3"/>
+          </a:fillRef>
+          <a:effectRef idx="0">
+            <a:schemeClr val="accent3"/>
+          </a:effectRef>
+          <a:fontRef idx="minor">
+            <a:schemeClr val="lt1"/>
+          </a:fontRef>
+        </p:style>
+        <p:txBody>
+          <a:bodyPr rtlCol="0" anchor="ctr"/>
+          <a:lstStyle/>
+          <a:p>
+            <a:pPr algn="ctr"/>
+            <a:endParaRPr lang="en-CA"/>
+          </a:p>
+        </p:txBody>
+      </p:sp>
+      <p:sp>
+        <p:nvSpPr>
+          <p:cNvPr id="17" name="Rectangle 16">
+            <a:extLst>
+              <a:ext uri="{FF2B5EF4-FFF2-40B4-BE49-F238E27FC236}">
+                <a16:creationId xmlns:a16="http://schemas.microsoft.com/office/drawing/2014/main" id="{8006E960-AD51-AEA9-DC73-714133217AD4}"/>
+              </a:ext>
+            </a:extLst>
+          </p:cNvPr>
+          <p:cNvSpPr/>
+          <p:nvPr/>
+        </p:nvSpPr>
+        <p:spPr>
+          <a:xfrm>
+            <a:off x="5434648" y="2390775"/>
+            <a:ext cx="3855404" cy="1346201"/>
+          </a:xfrm>
+          <a:prstGeom prst="rect">
+            <a:avLst/>
+          </a:prstGeom>
+          <a:noFill/>
+        </p:spPr>
+        <p:style>
+          <a:lnRef idx="2">
+            <a:schemeClr val="accent1">
+              <a:shade val="15000"/>
+            </a:schemeClr>
+          </a:lnRef>
+          <a:fillRef idx="1">
+            <a:schemeClr val="accent1"/>
+          </a:fillRef>
+          <a:effectRef idx="0">
+            <a:schemeClr val="accent1"/>
+          </a:effectRef>
+          <a:fontRef idx="minor">
+            <a:schemeClr val="lt1"/>
+          </a:fontRef>
+        </p:style>
+        <p:txBody>
+          <a:bodyPr rtlCol="0" anchor="ctr"/>
+          <a:lstStyle/>
+          <a:p>
+            <a:pPr algn="ctr"/>
+            <a:endParaRPr lang="en-CA">
+              <a:ln w="0"/>
+              <a:solidFill>
+                <a:schemeClr val="accent1"/>
+              </a:solidFill>
+              <a:effectLst>
+                <a:outerShdw blurRad="38100" dist="25400" dir="5400000" algn="ctr" rotWithShape="0">
+                  <a:srgbClr val="6E747A">
+                    <a:alpha val="43000"/>
+                  </a:srgbClr>
+                </a:outerShdw>
+              </a:effectLst>
+            </a:endParaRPr>
+          </a:p>
+        </p:txBody>
+      </p:sp>
+      <mc:AlternateContent xmlns:mc="http://schemas.openxmlformats.org/markup-compatibility/2006">
+        <mc:Choice xmlns:a14="http://schemas.microsoft.com/office/drawing/2010/main" Requires="a14">
+          <p:sp>
+            <p:nvSpPr>
+              <p:cNvPr id="18" name="Rectangle: Rounded Corners 17">
+                <a:extLst>
+                  <a:ext uri="{FF2B5EF4-FFF2-40B4-BE49-F238E27FC236}">
+                    <a16:creationId xmlns:a16="http://schemas.microsoft.com/office/drawing/2014/main" id="{58F5A841-F512-EFFA-7705-B25BC00140C3}"/>
+                  </a:ext>
+                </a:extLst>
+              </p:cNvPr>
+              <p:cNvSpPr/>
+              <p:nvPr/>
+            </p:nvSpPr>
+            <p:spPr>
+              <a:xfrm>
+                <a:off x="5603559" y="2530476"/>
+                <a:ext cx="1682750" cy="927100"/>
+              </a:xfrm>
+              <a:prstGeom prst="roundRect">
+                <a:avLst/>
+              </a:prstGeom>
+            </p:spPr>
+            <p:style>
+              <a:lnRef idx="2">
+                <a:schemeClr val="accent2">
+                  <a:shade val="15000"/>
+                </a:schemeClr>
+              </a:lnRef>
+              <a:fillRef idx="1">
+                <a:schemeClr val="accent2"/>
+              </a:fillRef>
+              <a:effectRef idx="0">
+                <a:schemeClr val="accent2"/>
+              </a:effectRef>
+              <a:fontRef idx="minor">
+                <a:schemeClr val="lt1"/>
+              </a:fontRef>
+            </p:style>
+            <p:txBody>
+              <a:bodyPr rtlCol="0" anchor="ctr"/>
+              <a:lstStyle/>
+              <a:p>
+                <a:pPr algn="ctr"/>
+                <a:r>
+                  <a:rPr lang="fr-CA" dirty="0"/>
+                  <a:t>Conv3x3</a:t>
+                </a:r>
+              </a:p>
+              <a:p>
+                <a:pPr algn="ctr"/>
+                <a:r>
+                  <a:rPr lang="fr-CA" dirty="0"/>
+                  <a:t>out </a:t>
+                </a:r>
+                <a14:m>
+                  <m:oMath xmlns:m="http://schemas.openxmlformats.org/officeDocument/2006/math">
+                    <m:r>
+                      <a:rPr lang="fr-CA" b="0" i="1" smtClean="0">
+                        <a:latin typeface="Cambria Math" panose="02040503050406030204" pitchFamily="18" charset="0"/>
+                      </a:rPr>
+                      <m:t>=</m:t>
+                    </m:r>
+                  </m:oMath>
+                </a14:m>
+                <a:r>
+                  <a:rPr lang="en-CA" dirty="0"/>
+                  <a:t> 16</a:t>
+                </a:r>
+              </a:p>
+            </p:txBody>
+          </p:sp>
+        </mc:Choice>
+        <mc:Fallback>
+          <p:sp>
+            <p:nvSpPr>
+              <p:cNvPr id="18" name="Rectangle: Rounded Corners 17">
+                <a:extLst>
+                  <a:ext uri="{FF2B5EF4-FFF2-40B4-BE49-F238E27FC236}">
+                    <a16:creationId xmlns:a16="http://schemas.microsoft.com/office/drawing/2014/main" id="{58F5A841-F512-EFFA-7705-B25BC00140C3}"/>
+                  </a:ext>
+                </a:extLst>
+              </p:cNvPr>
+              <p:cNvSpPr>
+                <a:spLocks noRot="1" noChangeAspect="1" noMove="1" noResize="1" noEditPoints="1" noAdjustHandles="1" noChangeArrowheads="1" noChangeShapeType="1" noTextEdit="1"/>
+              </p:cNvSpPr>
+              <p:nvPr/>
+            </p:nvSpPr>
+            <p:spPr>
+              <a:xfrm>
+                <a:off x="5603559" y="2530476"/>
+                <a:ext cx="1682750" cy="927100"/>
+              </a:xfrm>
+              <a:prstGeom prst="roundRect">
+                <a:avLst/>
+              </a:prstGeom>
+              <a:blipFill>
+                <a:blip r:embed="rId4"/>
+                <a:stretch>
+                  <a:fillRect/>
+                </a:stretch>
+              </a:blipFill>
+            </p:spPr>
+            <p:txBody>
+              <a:bodyPr/>
+              <a:lstStyle/>
+              <a:p>
+                <a:r>
+                  <a:rPr lang="en-CA">
+                    <a:noFill/>
+                  </a:rPr>
+                  <a:t> </a:t>
+                </a:r>
+              </a:p>
+            </p:txBody>
+          </p:sp>
+        </mc:Fallback>
+      </mc:AlternateContent>
+      <p:sp>
+        <p:nvSpPr>
+          <p:cNvPr id="20" name="Rectangle: Rounded Corners 19">
+            <a:extLst>
+              <a:ext uri="{FF2B5EF4-FFF2-40B4-BE49-F238E27FC236}">
+                <a16:creationId xmlns:a16="http://schemas.microsoft.com/office/drawing/2014/main" id="{1856030D-D2F8-EB7E-7E29-DCFFF4436D46}"/>
+              </a:ext>
+            </a:extLst>
+          </p:cNvPr>
+          <p:cNvSpPr/>
+          <p:nvPr/>
+        </p:nvSpPr>
+        <p:spPr>
+          <a:xfrm>
+            <a:off x="7428548" y="2530476"/>
+            <a:ext cx="1743711" cy="927100"/>
+          </a:xfrm>
+          <a:prstGeom prst="roundRect">
+            <a:avLst/>
+          </a:prstGeom>
+        </p:spPr>
+        <p:style>
+          <a:lnRef idx="2">
+            <a:schemeClr val="accent4">
+              <a:shade val="15000"/>
+            </a:schemeClr>
+          </a:lnRef>
+          <a:fillRef idx="1">
+            <a:schemeClr val="accent4"/>
+          </a:fillRef>
+          <a:effectRef idx="0">
+            <a:schemeClr val="accent4"/>
+          </a:effectRef>
+          <a:fontRef idx="minor">
+            <a:schemeClr val="lt1"/>
+          </a:fontRef>
+        </p:style>
+        <p:txBody>
+          <a:bodyPr rtlCol="0" anchor="ctr"/>
+          <a:lstStyle/>
+          <a:p>
+            <a:pPr algn="ctr"/>
+            <a:r>
+              <a:rPr lang="fr-CA" dirty="0" err="1"/>
+              <a:t>ReLU</a:t>
+            </a:r>
+            <a:endParaRPr lang="en-CA" dirty="0"/>
+          </a:p>
+        </p:txBody>
+      </p:sp>
+      <p:sp>
+        <p:nvSpPr>
+          <p:cNvPr id="21" name="TextBox 20">
+            <a:extLst>
+              <a:ext uri="{FF2B5EF4-FFF2-40B4-BE49-F238E27FC236}">
+                <a16:creationId xmlns:a16="http://schemas.microsoft.com/office/drawing/2014/main" id="{98C4E4C6-63AE-D6CF-F2FB-F5D21214952F}"/>
+              </a:ext>
+            </a:extLst>
+          </p:cNvPr>
+          <p:cNvSpPr txBox="1"/>
+          <p:nvPr/>
+        </p:nvSpPr>
+        <p:spPr>
+          <a:xfrm>
+            <a:off x="7216459" y="3527425"/>
+            <a:ext cx="1958339" cy="276999"/>
+          </a:xfrm>
+          <a:prstGeom prst="rect">
+            <a:avLst/>
+          </a:prstGeom>
+          <a:noFill/>
+        </p:spPr>
+        <p:txBody>
+          <a:bodyPr wrap="square" rtlCol="0">
+            <a:spAutoFit/>
+          </a:bodyPr>
+          <a:lstStyle/>
+          <a:p>
+            <a:r>
+              <a:rPr lang="fr-CA" sz="1200" dirty="0"/>
+              <a:t>3x, double out de Conv3x3</a:t>
+            </a:r>
+            <a:endParaRPr lang="en-CA" sz="1200" dirty="0"/>
+          </a:p>
+        </p:txBody>
+      </p:sp>
+      <p:sp>
+        <p:nvSpPr>
+          <p:cNvPr id="23" name="Rectangle: Rounded Corners 22">
+            <a:extLst>
+              <a:ext uri="{FF2B5EF4-FFF2-40B4-BE49-F238E27FC236}">
+                <a16:creationId xmlns:a16="http://schemas.microsoft.com/office/drawing/2014/main" id="{B00D355A-E854-D589-19D7-7ED89C2DCDCF}"/>
+              </a:ext>
+            </a:extLst>
+          </p:cNvPr>
+          <p:cNvSpPr/>
+          <p:nvPr/>
+        </p:nvSpPr>
+        <p:spPr>
+          <a:xfrm>
+            <a:off x="8003859" y="4941074"/>
+            <a:ext cx="1682750" cy="927100"/>
+          </a:xfrm>
+          <a:prstGeom prst="roundRect">
+            <a:avLst/>
+          </a:prstGeom>
+        </p:spPr>
+        <p:style>
+          <a:lnRef idx="2">
+            <a:schemeClr val="accent1">
+              <a:shade val="15000"/>
+            </a:schemeClr>
+          </a:lnRef>
+          <a:fillRef idx="1">
+            <a:schemeClr val="accent1"/>
+          </a:fillRef>
+          <a:effectRef idx="0">
+            <a:schemeClr val="accent1"/>
+          </a:effectRef>
+          <a:fontRef idx="minor">
+            <a:schemeClr val="lt1"/>
+          </a:fontRef>
+        </p:style>
+        <p:txBody>
+          <a:bodyPr rtlCol="0" anchor="ctr"/>
+          <a:lstStyle/>
+          <a:p>
+            <a:pPr algn="ctr"/>
+            <a:r>
+              <a:rPr lang="fr-CA" dirty="0"/>
+              <a:t>MLP</a:t>
+            </a:r>
+            <a:endParaRPr lang="en-CA" dirty="0"/>
+          </a:p>
+        </p:txBody>
+      </p:sp>
+      <p:sp>
+        <p:nvSpPr>
+          <p:cNvPr id="24" name="Arrow: Right 23">
+            <a:extLst>
+              <a:ext uri="{FF2B5EF4-FFF2-40B4-BE49-F238E27FC236}">
+                <a16:creationId xmlns:a16="http://schemas.microsoft.com/office/drawing/2014/main" id="{B38C27F0-090C-2D7C-D7C2-CE1AF38E2595}"/>
+              </a:ext>
+            </a:extLst>
+          </p:cNvPr>
+          <p:cNvSpPr/>
+          <p:nvPr/>
+        </p:nvSpPr>
+        <p:spPr>
+          <a:xfrm flipH="1">
+            <a:off x="7216458" y="5077599"/>
+            <a:ext cx="751839" cy="654050"/>
+          </a:xfrm>
+          <a:prstGeom prst="rightArrow">
+            <a:avLst/>
+          </a:prstGeom>
+        </p:spPr>
+        <p:style>
+          <a:lnRef idx="2">
+            <a:schemeClr val="accent3">
+              <a:shade val="15000"/>
+            </a:schemeClr>
+          </a:lnRef>
+          <a:fillRef idx="1">
+            <a:schemeClr val="accent3"/>
+          </a:fillRef>
+          <a:effectRef idx="0">
+            <a:schemeClr val="accent3"/>
+          </a:effectRef>
+          <a:fontRef idx="minor">
+            <a:schemeClr val="lt1"/>
+          </a:fontRef>
+        </p:style>
+        <p:txBody>
+          <a:bodyPr rtlCol="0" anchor="ctr"/>
+          <a:lstStyle/>
+          <a:p>
+            <a:pPr algn="ctr"/>
+            <a:endParaRPr lang="en-CA"/>
+          </a:p>
+        </p:txBody>
+      </p:sp>
+      <mc:AlternateContent xmlns:mc="http://schemas.openxmlformats.org/markup-compatibility/2006">
+        <mc:Choice xmlns:a14="http://schemas.microsoft.com/office/drawing/2010/main" Requires="a14">
+          <p:sp>
+            <p:nvSpPr>
+              <p:cNvPr id="27" name="Rectangle: Rounded Corners 26">
+                <a:extLst>
+                  <a:ext uri="{FF2B5EF4-FFF2-40B4-BE49-F238E27FC236}">
+                    <a16:creationId xmlns:a16="http://schemas.microsoft.com/office/drawing/2014/main" id="{EEED105A-4C6A-7782-426B-BE0FDE386187}"/>
+                  </a:ext>
+                </a:extLst>
+              </p:cNvPr>
+              <p:cNvSpPr/>
+              <p:nvPr/>
+            </p:nvSpPr>
+            <p:spPr>
+              <a:xfrm>
+                <a:off x="5498146" y="4941074"/>
+                <a:ext cx="1682750" cy="927100"/>
+              </a:xfrm>
+              <a:prstGeom prst="roundRect">
+                <a:avLst/>
+              </a:prstGeom>
+            </p:spPr>
+            <p:style>
+              <a:lnRef idx="2">
+                <a:schemeClr val="accent6">
+                  <a:shade val="15000"/>
+                </a:schemeClr>
+              </a:lnRef>
+              <a:fillRef idx="1">
+                <a:schemeClr val="accent6"/>
+              </a:fillRef>
+              <a:effectRef idx="0">
+                <a:schemeClr val="accent6"/>
+              </a:effectRef>
+              <a:fontRef idx="minor">
+                <a:schemeClr val="lt1"/>
+              </a:fontRef>
+            </p:style>
+            <p:txBody>
+              <a:bodyPr rtlCol="0" anchor="ctr"/>
+              <a:lstStyle/>
+              <a:p>
+                <a:pPr algn="ctr"/>
+                <a:r>
+                  <a:rPr lang="fr-CA" dirty="0"/>
+                  <a:t>GRU</a:t>
+                </a:r>
+              </a:p>
+              <a:p>
+                <a:pPr algn="ctr"/>
+                <a:r>
+                  <a:rPr lang="fr-CA" dirty="0" err="1"/>
+                  <a:t>hidden</a:t>
+                </a:r>
+                <a:r>
+                  <a:rPr lang="fr-CA" dirty="0"/>
+                  <a:t> </a:t>
+                </a:r>
+                <a14:m>
+                  <m:oMath xmlns:m="http://schemas.openxmlformats.org/officeDocument/2006/math">
+                    <m:r>
+                      <a:rPr lang="fr-CA" b="0" i="1" smtClean="0">
+                        <a:latin typeface="Cambria Math" panose="02040503050406030204" pitchFamily="18" charset="0"/>
+                      </a:rPr>
+                      <m:t>=</m:t>
+                    </m:r>
+                  </m:oMath>
+                </a14:m>
+                <a:r>
+                  <a:rPr lang="en-CA" dirty="0"/>
+                  <a:t> 128</a:t>
+                </a:r>
+              </a:p>
+            </p:txBody>
+          </p:sp>
+        </mc:Choice>
+        <mc:Fallback>
+          <p:sp>
+            <p:nvSpPr>
+              <p:cNvPr id="27" name="Rectangle: Rounded Corners 26">
+                <a:extLst>
+                  <a:ext uri="{FF2B5EF4-FFF2-40B4-BE49-F238E27FC236}">
+                    <a16:creationId xmlns:a16="http://schemas.microsoft.com/office/drawing/2014/main" id="{EEED105A-4C6A-7782-426B-BE0FDE386187}"/>
+                  </a:ext>
+                </a:extLst>
+              </p:cNvPr>
+              <p:cNvSpPr>
+                <a:spLocks noRot="1" noChangeAspect="1" noMove="1" noResize="1" noEditPoints="1" noAdjustHandles="1" noChangeArrowheads="1" noChangeShapeType="1" noTextEdit="1"/>
+              </p:cNvSpPr>
+              <p:nvPr/>
+            </p:nvSpPr>
+            <p:spPr>
+              <a:xfrm>
+                <a:off x="5498146" y="4941074"/>
+                <a:ext cx="1682750" cy="927100"/>
+              </a:xfrm>
+              <a:prstGeom prst="roundRect">
+                <a:avLst/>
+              </a:prstGeom>
+              <a:blipFill>
+                <a:blip r:embed="rId5"/>
+                <a:stretch>
+                  <a:fillRect/>
+                </a:stretch>
+              </a:blipFill>
+            </p:spPr>
+            <p:txBody>
+              <a:bodyPr/>
+              <a:lstStyle/>
+              <a:p>
+                <a:r>
+                  <a:rPr lang="en-CA">
+                    <a:noFill/>
+                  </a:rPr>
+                  <a:t> </a:t>
+                </a:r>
+              </a:p>
+            </p:txBody>
+          </p:sp>
+        </mc:Fallback>
+      </mc:AlternateContent>
+      <p:sp>
+        <p:nvSpPr>
+          <p:cNvPr id="2" name="Rectangle 1">
+            <a:extLst>
+              <a:ext uri="{FF2B5EF4-FFF2-40B4-BE49-F238E27FC236}">
+                <a16:creationId xmlns:a16="http://schemas.microsoft.com/office/drawing/2014/main" id="{C9DC5B59-B8E3-94A4-F9AC-A448F5CEA539}"/>
+              </a:ext>
+            </a:extLst>
+          </p:cNvPr>
+          <p:cNvSpPr/>
+          <p:nvPr/>
+        </p:nvSpPr>
+        <p:spPr>
+          <a:xfrm>
+            <a:off x="4038600" y="2641600"/>
+            <a:ext cx="457200" cy="1642249"/>
+          </a:xfrm>
+          <a:prstGeom prst="rect">
+            <a:avLst/>
+          </a:prstGeom>
+          <a:noFill/>
+          <a:ln>
+            <a:solidFill>
+              <a:srgbClr val="00B050"/>
+            </a:solidFill>
+          </a:ln>
+        </p:spPr>
+        <p:style>
+          <a:lnRef idx="2">
+            <a:schemeClr val="accent1">
+              <a:shade val="15000"/>
+            </a:schemeClr>
+          </a:lnRef>
+          <a:fillRef idx="1">
+            <a:schemeClr val="accent1"/>
+          </a:fillRef>
+          <a:effectRef idx="0">
+            <a:schemeClr val="accent1"/>
+          </a:effectRef>
+          <a:fontRef idx="minor">
+            <a:schemeClr val="lt1"/>
+          </a:fontRef>
+        </p:style>
+        <p:txBody>
+          <a:bodyPr rtlCol="0" anchor="ctr"/>
+          <a:lstStyle/>
+          <a:p>
+            <a:pPr algn="ctr"/>
+            <a:endParaRPr lang="en-CA"/>
+          </a:p>
+        </p:txBody>
+      </p:sp>
+      <p:sp>
+        <p:nvSpPr>
+          <p:cNvPr id="4" name="Arrow: Right 3">
+            <a:extLst>
+              <a:ext uri="{FF2B5EF4-FFF2-40B4-BE49-F238E27FC236}">
+                <a16:creationId xmlns:a16="http://schemas.microsoft.com/office/drawing/2014/main" id="{1027B23E-DA6F-5078-4502-F045277F4FAA}"/>
+              </a:ext>
+            </a:extLst>
+          </p:cNvPr>
+          <p:cNvSpPr/>
+          <p:nvPr/>
+        </p:nvSpPr>
+        <p:spPr>
+          <a:xfrm rot="5400000">
+            <a:off x="8343584" y="4048898"/>
+            <a:ext cx="1003300" cy="654050"/>
+          </a:xfrm>
+          <a:prstGeom prst="rightArrow">
+            <a:avLst/>
+          </a:prstGeom>
+        </p:spPr>
+        <p:style>
+          <a:lnRef idx="2">
+            <a:schemeClr val="accent3">
+              <a:shade val="15000"/>
+            </a:schemeClr>
+          </a:lnRef>
+          <a:fillRef idx="1">
+            <a:schemeClr val="accent3"/>
+          </a:fillRef>
+          <a:effectRef idx="0">
+            <a:schemeClr val="accent3"/>
+          </a:effectRef>
+          <a:fontRef idx="minor">
+            <a:schemeClr val="lt1"/>
+          </a:fontRef>
+        </p:style>
+        <p:txBody>
+          <a:bodyPr rtlCol="0" anchor="ctr"/>
+          <a:lstStyle/>
+          <a:p>
+            <a:pPr algn="ctr"/>
+            <a:endParaRPr lang="en-CA"/>
+          </a:p>
+        </p:txBody>
+      </p:sp>
+      <p:sp>
+        <p:nvSpPr>
+          <p:cNvPr id="5" name="Arrow: Bent 4">
+            <a:extLst>
+              <a:ext uri="{FF2B5EF4-FFF2-40B4-BE49-F238E27FC236}">
+                <a16:creationId xmlns:a16="http://schemas.microsoft.com/office/drawing/2014/main" id="{054861AE-48A8-937B-B5C8-E5A352499574}"/>
+              </a:ext>
+            </a:extLst>
+          </p:cNvPr>
+          <p:cNvSpPr/>
+          <p:nvPr/>
+        </p:nvSpPr>
+        <p:spPr>
+          <a:xfrm rot="10800000" flipH="1">
+            <a:off x="4118921" y="4337399"/>
+            <a:ext cx="1315727" cy="1394250"/>
+          </a:xfrm>
+          <a:prstGeom prst="bentArrow">
+            <a:avLst/>
+          </a:prstGeom>
+          <a:solidFill>
+            <a:schemeClr val="accent3"/>
+          </a:solidFill>
+        </p:spPr>
+        <p:style>
+          <a:lnRef idx="2">
+            <a:schemeClr val="accent1">
+              <a:shade val="15000"/>
+            </a:schemeClr>
+          </a:lnRef>
+          <a:fillRef idx="1">
+            <a:schemeClr val="accent1"/>
+          </a:fillRef>
+          <a:effectRef idx="0">
+            <a:schemeClr val="accent1"/>
+          </a:effectRef>
+          <a:fontRef idx="minor">
+            <a:schemeClr val="lt1"/>
+          </a:fontRef>
+        </p:style>
+        <p:txBody>
+          <a:bodyPr rtlCol="0" anchor="ctr"/>
+          <a:lstStyle/>
+          <a:p>
+            <a:pPr algn="ctr"/>
+            <a:endParaRPr lang="en-CA">
+              <a:solidFill>
+                <a:schemeClr val="tx1"/>
+              </a:solidFill>
+            </a:endParaRPr>
+          </a:p>
+        </p:txBody>
+      </p:sp>
+      <p:sp>
+        <p:nvSpPr>
+          <p:cNvPr id="6" name="Arrow: Right 5">
+            <a:extLst>
+              <a:ext uri="{FF2B5EF4-FFF2-40B4-BE49-F238E27FC236}">
+                <a16:creationId xmlns:a16="http://schemas.microsoft.com/office/drawing/2014/main" id="{E2419809-0B74-59DC-9F7D-3A1612847160}"/>
+              </a:ext>
+            </a:extLst>
+          </p:cNvPr>
+          <p:cNvSpPr/>
+          <p:nvPr/>
+        </p:nvSpPr>
+        <p:spPr>
+          <a:xfrm rot="5400000">
+            <a:off x="6023608" y="5916614"/>
+            <a:ext cx="631825" cy="654050"/>
+          </a:xfrm>
+          <a:prstGeom prst="rightArrow">
+            <a:avLst/>
+          </a:prstGeom>
+        </p:spPr>
+        <p:style>
+          <a:lnRef idx="2">
+            <a:schemeClr val="accent3">
+              <a:shade val="15000"/>
+            </a:schemeClr>
+          </a:lnRef>
+          <a:fillRef idx="1">
+            <a:schemeClr val="accent3"/>
+          </a:fillRef>
+          <a:effectRef idx="0">
+            <a:schemeClr val="accent3"/>
+          </a:effectRef>
+          <a:fontRef idx="minor">
+            <a:schemeClr val="lt1"/>
+          </a:fontRef>
+        </p:style>
+        <p:txBody>
+          <a:bodyPr rtlCol="0" anchor="ctr"/>
+          <a:lstStyle/>
+          <a:p>
+            <a:pPr algn="ctr"/>
+            <a:endParaRPr lang="en-CA"/>
+          </a:p>
+        </p:txBody>
+      </p:sp>
+      <p:sp>
+        <p:nvSpPr>
+          <p:cNvPr id="8" name="TextBox 7">
+            <a:extLst>
+              <a:ext uri="{FF2B5EF4-FFF2-40B4-BE49-F238E27FC236}">
+                <a16:creationId xmlns:a16="http://schemas.microsoft.com/office/drawing/2014/main" id="{20AA6564-03E5-C1A8-B2F2-89FC28ECBBC5}"/>
+              </a:ext>
+            </a:extLst>
+          </p:cNvPr>
+          <p:cNvSpPr txBox="1"/>
+          <p:nvPr/>
+        </p:nvSpPr>
+        <p:spPr>
+          <a:xfrm>
+            <a:off x="5578475" y="6488668"/>
+            <a:ext cx="1682750" cy="369332"/>
+          </a:xfrm>
+          <a:prstGeom prst="rect">
+            <a:avLst/>
+          </a:prstGeom>
+          <a:noFill/>
+        </p:spPr>
+        <p:txBody>
+          <a:bodyPr wrap="square" rtlCol="0">
+            <a:spAutoFit/>
+          </a:bodyPr>
+          <a:lstStyle/>
+          <a:p>
+            <a:r>
+              <a:rPr lang="fr-CA" dirty="0"/>
+              <a:t>Approximation</a:t>
+            </a:r>
+            <a:endParaRPr lang="en-CA" dirty="0"/>
+          </a:p>
+        </p:txBody>
+      </p:sp>
+    </p:spTree>
+    <p:extLst>
+      <p:ext uri="{BB962C8B-B14F-4D97-AF65-F5344CB8AC3E}">
+        <p14:creationId xmlns:p14="http://schemas.microsoft.com/office/powerpoint/2010/main" val="2640186849"/>
       </p:ext>
     </p:extLst>
   </p:cSld>
